--- a/ZenBreath/rezultat/ZenBreath_Prezentacija.pptx
+++ b/ZenBreath/rezultat/ZenBreath_Prezentacija.pptx
@@ -5983,7 +5983,15 @@
                   <a:srgbClr val="F8FAFC"/>
                 </a:solidFill>
               </a:rPr>
-              <a:t> Deep Sleep </a:t>
+              <a:t> </a:t>
+            </a:r>
+            <a:r>
+              <a:rPr lang="hr-HR" dirty="0">
+                <a:solidFill>
+                  <a:srgbClr val="F8FAFC"/>
+                </a:solidFill>
+              </a:rPr>
+              <a:t>Standby </a:t>
             </a:r>
             <a:r>
               <a:rPr dirty="0" err="1">
@@ -7361,7 +7369,7 @@
         <p:spPr>
           <a:xfrm>
             <a:off x="731519" y="1828800"/>
-            <a:ext cx="6592645" cy="2893100"/>
+            <a:ext cx="6592645" cy="3447098"/>
           </a:xfrm>
           <a:prstGeom prst="rect">
             <a:avLst/>
@@ -7382,7 +7390,168 @@
               </a:defRPr>
             </a:pPr>
             <a:r>
-              <a:t>• Inaktivnost: Ako unutar 30 sekundi protok zraka ne pređe prag (korisnik ne koristi uređaj), sustav gasi OLED zaslon radi sprječavanja burn-in efekta i štednje energije.</a:t>
+              <a:rPr dirty="0"/>
+              <a:t>• </a:t>
+            </a:r>
+            <a:r>
+              <a:rPr dirty="0" err="1"/>
+              <a:t>Inaktivnost</a:t>
+            </a:r>
+            <a:r>
+              <a:rPr dirty="0"/>
+              <a:t>: Ako </a:t>
+            </a:r>
+            <a:r>
+              <a:rPr dirty="0" err="1"/>
+              <a:t>unutar</a:t>
+            </a:r>
+            <a:r>
+              <a:rPr dirty="0"/>
+              <a:t> </a:t>
+            </a:r>
+            <a:r>
+              <a:rPr lang="hr-HR" dirty="0"/>
+              <a:t>10</a:t>
+            </a:r>
+            <a:r>
+              <a:rPr dirty="0"/>
+              <a:t> </a:t>
+            </a:r>
+            <a:r>
+              <a:rPr dirty="0" err="1"/>
+              <a:t>sekundi</a:t>
+            </a:r>
+            <a:r>
+              <a:rPr dirty="0"/>
+              <a:t> </a:t>
+            </a:r>
+            <a:r>
+              <a:rPr dirty="0" err="1"/>
+              <a:t>protok</a:t>
+            </a:r>
+            <a:r>
+              <a:rPr dirty="0"/>
+              <a:t> </a:t>
+            </a:r>
+            <a:r>
+              <a:rPr dirty="0" err="1"/>
+              <a:t>zraka</a:t>
+            </a:r>
+            <a:r>
+              <a:rPr dirty="0"/>
+              <a:t> ne </a:t>
+            </a:r>
+            <a:r>
+              <a:rPr dirty="0" err="1"/>
+              <a:t>pređe</a:t>
+            </a:r>
+            <a:r>
+              <a:rPr dirty="0"/>
+              <a:t> </a:t>
+            </a:r>
+            <a:r>
+              <a:rPr dirty="0" err="1"/>
+              <a:t>prag</a:t>
+            </a:r>
+            <a:r>
+              <a:rPr dirty="0"/>
+              <a:t> (</a:t>
+            </a:r>
+            <a:r>
+              <a:rPr dirty="0" err="1"/>
+              <a:t>korisnik</a:t>
+            </a:r>
+            <a:r>
+              <a:rPr dirty="0"/>
+              <a:t> ne </a:t>
+            </a:r>
+            <a:r>
+              <a:rPr dirty="0" err="1"/>
+              <a:t>koristi</a:t>
+            </a:r>
+            <a:r>
+              <a:rPr dirty="0"/>
+              <a:t> </a:t>
+            </a:r>
+            <a:r>
+              <a:rPr dirty="0" err="1"/>
+              <a:t>uređaj</a:t>
+            </a:r>
+            <a:r>
+              <a:rPr dirty="0"/>
+              <a:t>), </a:t>
+            </a:r>
+            <a:r>
+              <a:rPr dirty="0" err="1"/>
+              <a:t>sustav</a:t>
+            </a:r>
+            <a:r>
+              <a:rPr dirty="0"/>
+              <a:t> </a:t>
+            </a:r>
+            <a:r>
+              <a:rPr dirty="0" err="1"/>
+              <a:t>gasi</a:t>
+            </a:r>
+            <a:r>
+              <a:rPr dirty="0"/>
+              <a:t> OLED </a:t>
+            </a:r>
+            <a:r>
+              <a:rPr dirty="0" err="1"/>
+              <a:t>zaslon</a:t>
+            </a:r>
+            <a:r>
+              <a:rPr dirty="0"/>
+              <a:t> </a:t>
+            </a:r>
+            <a:r>
+              <a:rPr dirty="0" err="1"/>
+              <a:t>radi</a:t>
+            </a:r>
+            <a:r>
+              <a:rPr dirty="0"/>
+              <a:t> </a:t>
+            </a:r>
+            <a:r>
+              <a:rPr dirty="0" err="1"/>
+              <a:t>sprječavanja</a:t>
+            </a:r>
+            <a:r>
+              <a:rPr dirty="0"/>
+              <a:t> burn-in </a:t>
+            </a:r>
+            <a:r>
+              <a:rPr dirty="0" err="1"/>
+              <a:t>efekta</a:t>
+            </a:r>
+            <a:r>
+              <a:rPr dirty="0"/>
+              <a:t> </a:t>
+            </a:r>
+            <a:r>
+              <a:rPr dirty="0" err="1"/>
+              <a:t>i</a:t>
+            </a:r>
+            <a:r>
+              <a:rPr dirty="0"/>
+              <a:t> </a:t>
+            </a:r>
+            <a:r>
+              <a:rPr dirty="0" err="1"/>
+              <a:t>štednje</a:t>
+            </a:r>
+            <a:r>
+              <a:rPr dirty="0"/>
+              <a:t> </a:t>
+            </a:r>
+            <a:r>
+              <a:rPr dirty="0" err="1"/>
+              <a:t>energije</a:t>
+            </a:r>
+            <a:r>
+              <a:rPr dirty="0"/>
+              <a:t>.</a:t>
             </a:r>
           </a:p>
           <a:p>
@@ -7397,7 +7566,12 @@
               </a:defRPr>
             </a:pPr>
             <a:r>
-              <a:t>• Deep Sleep način rada: Mikrokontroler gasi procesorske jezgre i Wi-Fi primopredajnik, spuštajući potrošnju struje na kritični minimum (&lt; 15 uA).</a:t>
+              <a:rPr dirty="0"/>
+              <a:t>• </a:t>
+            </a:r>
+            <a:r>
+              <a:rPr lang="hr-HR" dirty="0"/>
+              <a:t>Standby način rada: Mikrokontroler programski isključuje Wi-Fi modul i gasi OLED zaslon, čime oslobađa procesorske resurse i vjerno simulira niskoenergetski režim rada perifernih jedinica.</a:t>
             </a:r>
           </a:p>
           <a:p>
@@ -7412,8 +7586,22 @@
               </a:defRPr>
             </a:pPr>
             <a:r>
-              <a:t>• RTC Buđenje: Pomoću esp_sleep_enable_ext0_wakeup() definiran je vanjski prekid na GPIO 14. Pritisak fizičkog gumba trenutno ponovno pokreće i inicijalizira sustav.</a:t>
-            </a:r>
+              <a:rPr dirty="0"/>
+              <a:t>• </a:t>
+            </a:r>
+            <a:r>
+              <a:rPr lang="hr-HR" dirty="0"/>
+              <a:t>Reaktivacija iz Standby moda</a:t>
+            </a:r>
+            <a:r>
+              <a:rPr dirty="0"/>
+              <a:t>: </a:t>
+            </a:r>
+            <a:r>
+              <a:rPr lang="hr-HR" dirty="0"/>
+              <a:t>Kontinuiranim programskim nadzorom pina GPIO 14 detektira se pritisak gumba. Taj pritisak trenutno ponovno uključuje Wi-Fi modul i OLED zaslon te vraća sustav u aktivni način rada bez potrebe za potpunim ponovnim pokretanjem (rebootom) cijelog čipa.</a:t>
+            </a:r>
+            <a:endParaRPr dirty="0"/>
           </a:p>
         </p:txBody>
       </p:sp>
